--- a/slides/oraviz-results-deck.pptx
+++ b/slides/oraviz-results-deck.pptx
@@ -3937,7 +3937,7 @@
                   <a:srgbClr val="C74634"/>
                 </a:solidFill>
               </a:rPr>
-              <a:t>844</a:t>
+              <a:t>862</a:t>
             </a:r>
           </a:p>
           <a:p>
@@ -3948,7 +3948,7 @@
                   <a:srgbClr val="6B6B6B"/>
                 </a:solidFill>
               </a:rPr>
-              <a:t>tokens of tool schemas — OraViz (60.5% fewer)</a:t>
+              <a:t>tokens of tool schemas — OraViz (59.7% fewer)</a:t>
             </a:r>
           </a:p>
         </p:txBody>
@@ -5989,7 +5989,7 @@
                   <a:srgbClr val="C74634"/>
                 </a:solidFill>
               </a:rPr>
-              <a:t>-60.5%</a:t>
+              <a:t>-59.7%</a:t>
             </a:r>
           </a:p>
           <a:p>
@@ -6000,7 +6000,7 @@
                   <a:srgbClr val="6B6B6B"/>
                 </a:solidFill>
               </a:rPr>
-              <a:t>tool schemas (844 vs 2,139)</a:t>
+              <a:t>tool schemas (862 vs 2,139)</a:t>
             </a:r>
           </a:p>
         </p:txBody>
@@ -6051,7 +6051,7 @@
                   <a:srgbClr val="C74634"/>
                 </a:solidFill>
               </a:rPr>
-              <a:t>-53.7%</a:t>
+              <a:t>-53.3%</a:t>
             </a:r>
           </a:p>
           <a:p>
@@ -6062,7 +6062,7 @@
                   <a:srgbClr val="6B6B6B"/>
                 </a:solidFill>
               </a:rPr>
-              <a:t>tool results (2,319 vs 5,004)</a:t>
+              <a:t>tool results (2,337 vs 5,004)</a:t>
             </a:r>
           </a:p>
         </p:txBody>
@@ -6113,7 +6113,7 @@
                   <a:srgbClr val="C74634"/>
                 </a:solidFill>
               </a:rPr>
-              <a:t>-53.7%</a:t>
+              <a:t>-53.3%</a:t>
             </a:r>
           </a:p>
           <a:p>
@@ -6124,7 +6124,7 @@
                   <a:srgbClr val="6B6B6B"/>
                 </a:solidFill>
               </a:rPr>
-              <a:t>total (2,319 vs 5,006)</a:t>
+              <a:t>total (2,337 vs 5,006)</a:t>
             </a:r>
           </a:p>
         </p:txBody>
@@ -6182,7 +6182,7 @@
                   <a:srgbClr val="6B6B6B"/>
                 </a:solidFill>
               </a:rPr>
-              <a:t>o200k_base agrees within one point (53.6% total savings).</a:t>
+              <a:t>o200k_base agrees within one point (53.2% total savings).</a:t>
             </a:r>
           </a:p>
         </p:txBody>
